--- a/report/docs-slides/Legal_RAG_Slides.pptx
+++ b/report/docs-slides/Legal_RAG_Slides.pptx
@@ -2331,11 +2331,48 @@
           <a:bodyPr wrap="square" lIns="0" tIns="0" rIns="0" bIns="0" rtlCol="0" anchor="ctr"/>
           <a:lstStyle/>
           <a:p>
+            <a:r>
+              <a:rPr lang="en-US" sz="1400" dirty="0">
+                <a:solidFill>
+                  <a:schemeClr val="bg1"/>
+                </a:solidFill>
+              </a:rPr>
+              <a:t>- Anindya Sunder Chakravarty	- Rohan Baidya</a:t>
+            </a:r>
+            <a:endParaRPr lang="en-NP" sz="1400" dirty="0">
+              <a:solidFill>
+                <a:schemeClr val="bg1"/>
+              </a:solidFill>
+            </a:endParaRPr>
+          </a:p>
+        </p:txBody>
+      </p:sp>
+      <p:sp>
+        <p:nvSpPr>
+          <p:cNvPr id="17" name="Text 15"/>
+          <p:cNvSpPr/>
+          <p:nvPr/>
+        </p:nvSpPr>
+        <p:spPr>
+          <a:xfrm>
+            <a:off x="320040" y="4288536"/>
+            <a:ext cx="7315200" cy="201168"/>
+          </a:xfrm>
+          <a:prstGeom prst="rect">
+            <a:avLst/>
+          </a:prstGeom>
+          <a:noFill/>
+          <a:ln/>
+        </p:spPr>
+        <p:txBody>
+          <a:bodyPr wrap="square" lIns="0" tIns="0" rIns="0" bIns="0" rtlCol="0" anchor="ctr"/>
+          <a:lstStyle/>
+          <a:p>
             <a:pPr marL="0" indent="0">
               <a:buNone/>
             </a:pPr>
             <a:r>
-              <a:rPr lang="en-US" sz="1000" dirty="0">
+              <a:rPr lang="en-US" dirty="0">
                 <a:solidFill>
                   <a:srgbClr val="8896AA"/>
                 </a:solidFill>
@@ -2343,48 +2380,9 @@
                 <a:ea typeface="Calibri" pitchFamily="34" charset="-122"/>
                 <a:cs typeface="Calibri" pitchFamily="34" charset="-120"/>
               </a:rPr>
-              <a:t>Francesco Ventimiglia  ·  Danilo Rodriguez  ·  Hussain Ullah Baig</a:t>
-            </a:r>
-            <a:endParaRPr lang="en-US" sz="1000" dirty="0"/>
-          </a:p>
-        </p:txBody>
-      </p:sp>
-      <p:sp>
-        <p:nvSpPr>
-          <p:cNvPr id="17" name="Text 15"/>
-          <p:cNvSpPr/>
-          <p:nvPr/>
-        </p:nvSpPr>
-        <p:spPr>
-          <a:xfrm>
-            <a:off x="320040" y="4892040"/>
-            <a:ext cx="7315200" cy="201168"/>
-          </a:xfrm>
-          <a:prstGeom prst="rect">
-            <a:avLst/>
-          </a:prstGeom>
-          <a:noFill/>
-          <a:ln/>
-        </p:spPr>
-        <p:txBody>
-          <a:bodyPr wrap="square" lIns="0" tIns="0" rIns="0" bIns="0" rtlCol="0" anchor="ctr"/>
-          <a:lstStyle/>
-          <a:p>
-            <a:pPr marL="0" indent="0">
-              <a:buNone/>
-            </a:pPr>
-            <a:r>
-              <a:rPr lang="en-US" sz="900" dirty="0">
-                <a:solidFill>
-                  <a:srgbClr val="8896AA"/>
-                </a:solidFill>
-                <a:latin typeface="Calibri" pitchFamily="34" charset="0"/>
-                <a:ea typeface="Calibri" pitchFamily="34" charset="-122"/>
-                <a:cs typeface="Calibri" pitchFamily="34" charset="-120"/>
-              </a:rPr>
               <a:t>Text Mining Project  |  Prof. Flora Amato</a:t>
             </a:r>
-            <a:endParaRPr lang="en-US" sz="900" dirty="0"/>
+            <a:endParaRPr lang="en-US" dirty="0"/>
           </a:p>
         </p:txBody>
       </p:sp>
